--- a/exports/12_image_layouts.pptx
+++ b/exports/12_image_layouts.pptx
@@ -504,7 +504,8 @@
           <a:p>
             <a:r>
               <a:rPr lang="en-US" dirty="0"/>
-              <a:t>Product showcase with high resolution photography.</a:t>
+              <a:t>Product showcase with high resolution photography.
+Source: 12_image_layouts.pdf</a:t>
             </a:r>
             <a:endParaRPr lang="en-US" dirty="0"/>
           </a:p>
@@ -592,7 +593,8 @@
           <a:p>
             <a:r>
               <a:rPr lang="en-US" dirty="0"/>
-              <a:t>Split layout with curated stock photography.</a:t>
+              <a:t>Split layout with curated stock photography.
+Source: 12_image_layouts.pdf</a:t>
             </a:r>
             <a:endParaRPr lang="en-US" dirty="0"/>
           </a:p>
@@ -680,7 +682,8 @@
           <a:p>
             <a:r>
               <a:rPr lang="en-US" dirty="0"/>
-              <a:t>Full bleed dramatic hero image with text overlay.</a:t>
+              <a:t>Full bleed dramatic hero image with text overlay.
+Source: 12_image_layouts.pdf</a:t>
             </a:r>
             <a:endParaRPr lang="en-US" dirty="0"/>
           </a:p>
@@ -1296,48 +1299,7 @@
         <p:spPr>
           <a:xfrm>
             <a:off x="6339840" y="1508760"/>
-            <a:ext cx="5242560" cy="822960"/>
-          </a:xfrm>
-          <a:prstGeom prst="rect">
-            <a:avLst/>
-          </a:prstGeom>
-          <a:noFill/>
-          <a:ln/>
-        </p:spPr>
-        <p:txBody>
-          <a:bodyPr wrap="square" rtlCol="0" anchor="ctr">
-            <a:normAutofit/>
-          </a:bodyPr>
-          <a:lstStyle/>
-          <a:p>
-            <a:pPr indent="0" marL="0">
-              <a:buNone/>
-            </a:pPr>
-            <a:r>
-              <a:rPr lang="en-US" sz="2200" b="1" dirty="0">
-                <a:solidFill>
-                  <a:srgbClr val="292524"/>
-                </a:solidFill>
-                <a:latin typeface="Palatino Linotype" pitchFamily="34" charset="0"/>
-                <a:ea typeface="Palatino Linotype" pitchFamily="34" charset="-122"/>
-                <a:cs typeface="Palatino Linotype" pitchFamily="34" charset="-120"/>
-              </a:rPr>
-              <a:t>San Francisco Flagship Studio</a:t>
-            </a:r>
-            <a:endParaRPr lang="en-US" sz="2200" dirty="0"/>
-          </a:p>
-        </p:txBody>
-      </p:sp>
-      <p:sp>
-        <p:nvSpPr>
-          <p:cNvPr id="7" name="Text 3"/>
-          <p:cNvSpPr/>
-          <p:nvPr/>
-        </p:nvSpPr>
-        <p:spPr>
-          <a:xfrm>
-            <a:off x="6339840" y="2468880"/>
-            <a:ext cx="5242560" cy="3566160"/>
+            <a:ext cx="5242560" cy="3429000"/>
           </a:xfrm>
           <a:prstGeom prst="rect">
             <a:avLst/>
@@ -1403,6 +1365,47 @@
               <a:t>Energy efficient circadian lighting systems installed throughout</a:t>
             </a:r>
             <a:endParaRPr lang="en-US" sz="1800" dirty="0"/>
+          </a:p>
+        </p:txBody>
+      </p:sp>
+      <p:sp>
+        <p:nvSpPr>
+          <p:cNvPr id="7" name="Text 3"/>
+          <p:cNvSpPr/>
+          <p:nvPr/>
+        </p:nvSpPr>
+        <p:spPr>
+          <a:xfrm>
+            <a:off x="6339840" y="5074920"/>
+            <a:ext cx="5242560" cy="822960"/>
+          </a:xfrm>
+          <a:prstGeom prst="rect">
+            <a:avLst/>
+          </a:prstGeom>
+          <a:noFill/>
+          <a:ln/>
+        </p:spPr>
+        <p:txBody>
+          <a:bodyPr wrap="square" rtlCol="0" anchor="ctr">
+            <a:normAutofit/>
+          </a:bodyPr>
+          <a:lstStyle/>
+          <a:p>
+            <a:pPr indent="0" marL="0">
+              <a:buNone/>
+            </a:pPr>
+            <a:r>
+              <a:rPr lang="en-US" sz="1600" i="1" dirty="0">
+                <a:solidFill>
+                  <a:srgbClr val="292524"/>
+                </a:solidFill>
+                <a:latin typeface="Georgia" pitchFamily="34" charset="0"/>
+                <a:ea typeface="Georgia" pitchFamily="34" charset="-122"/>
+                <a:cs typeface="Georgia" pitchFamily="34" charset="-120"/>
+              </a:rPr>
+              <a:t>San Francisco Flagship Studio</a:t>
+            </a:r>
+            <a:endParaRPr lang="en-US" sz="1600" dirty="0"/>
           </a:p>
         </p:txBody>
       </p:sp>
@@ -1472,9 +1475,29 @@
           </a:p>
         </p:txBody>
       </p:sp>
+      <p:sp>
+        <p:nvSpPr>
+          <p:cNvPr id="4" name="Shape 1"/>
+          <p:cNvSpPr/>
+          <p:nvPr/>
+        </p:nvSpPr>
+        <p:spPr>
+          <a:xfrm>
+            <a:off x="0" y="0"/>
+            <a:ext cx="12192000" cy="6858000"/>
+          </a:xfrm>
+          <a:prstGeom prst="rect">
+            <a:avLst/>
+          </a:prstGeom>
+          <a:solidFill>
+            <a:srgbClr val="0A0F1D"/>
+          </a:solidFill>
+          <a:ln/>
+        </p:spPr>
+      </p:sp>
       <p:pic>
         <p:nvPicPr>
-          <p:cNvPr id="4" name="Image 0" descr="preencoded.png">    </p:cNvPr>
+          <p:cNvPr id="5" name="Image 0" descr="preencoded.png">    </p:cNvPr>
           <p:cNvPicPr>
             <a:picLocks noChangeAspect="1"/>
           </p:cNvPicPr>
@@ -1498,7 +1521,7 @@
       </p:pic>
       <p:sp>
         <p:nvSpPr>
-          <p:cNvPr id="5" name="Shape 1"/>
+          <p:cNvPr id="6" name="Shape 2"/>
           <p:cNvSpPr/>
           <p:nvPr/>
         </p:nvSpPr>
@@ -1520,7 +1543,7 @@
       </p:sp>
       <p:sp>
         <p:nvSpPr>
-          <p:cNvPr id="6" name="Text 2"/>
+          <p:cNvPr id="7" name="Text 3"/>
           <p:cNvSpPr/>
           <p:nvPr/>
         </p:nvSpPr>
@@ -1561,7 +1584,7 @@
       </p:sp>
       <p:sp>
         <p:nvSpPr>
-          <p:cNvPr id="7" name="Text 3"/>
+          <p:cNvPr id="8" name="Text 4"/>
           <p:cNvSpPr/>
           <p:nvPr/>
         </p:nvSpPr>
